--- a/10-Knowledge-Products/KP2-GIF/videos/module_2/en/decks/KP2_M2_2.4_Deck_v0.1.pptx
+++ b/10-Knowledge-Products/KP2-GIF/videos/module_2/en/decks/KP2_M2_2.4_Deck_v0.1.pptx
@@ -11570,7 +11570,7 @@
                 </a:solidFill>
                 <a:latin typeface="Arial"/>
               </a:rPr>
-              <a:t>KP2 · MODULE 2 · VIDEO 2.4</a:t>
+              <a:t>MODULE 2 · VIDEO 2.4</a:t>
             </a:r>
           </a:p>
         </p:txBody>
